--- a/INSURANCE POLICY DATA ANALYSIS PPT.pptx
+++ b/INSURANCE POLICY DATA ANALYSIS PPT.pptx
@@ -235,982 +235,30 @@
 </p188:authorLst>
 </file>
 
-<file path=ppt/revisionInfo.xml><?xml version="1.0" encoding="utf-8"?>
-<p1510:revInfo xmlns:a="http://schemas.openxmlformats.org/drawingml/2006/main" xmlns:r="http://schemas.openxmlformats.org/officeDocument/2006/relationships" xmlns:p1510="http://schemas.microsoft.com/office/powerpoint/2015/10/main">
-  <p1510:revLst>
-    <p1510:client id="{F884D4C3-22FD-40CA-8BB0-2CC11FFB5EA3}" v="17" dt="2026-08-14T15:36:04.517"/>
-  </p1510:revLst>
-</p1510:revInfo>
-</file>
-
 <file path=ppt/changesInfos/changesInfo1.xml><?xml version="1.0" encoding="utf-8"?>
 <pc:chgInfo xmlns:a="http://schemas.openxmlformats.org/drawingml/2006/main" xmlns:r="http://schemas.openxmlformats.org/officeDocument/2006/relationships" xmlns:ac="http://schemas.microsoft.com/office/drawing/2013/main/command" xmlns:pc="http://schemas.microsoft.com/office/powerpoint/2013/main/command">
   <pc:docChgLst>
     <pc:chgData name="Lav Dubey" userId="7279828d398a9119" providerId="LiveId" clId="{2AA98B38-00A7-4B61-BAF4-C8311D89AA21}"/>
     <pc:docChg chg="undo redo custSel addSld delSld modSld sldOrd modMainMaster">
-      <pc:chgData name="Lav Dubey" userId="7279828d398a9119" providerId="LiveId" clId="{2AA98B38-00A7-4B61-BAF4-C8311D89AA21}" dt="2026-08-14T15:36:04.517" v="1025"/>
+      <pc:chgData name="Lav Dubey" userId="7279828d398a9119" providerId="LiveId" clId="{2AA98B38-00A7-4B61-BAF4-C8311D89AA21}" dt="2026-10-04T07:08:45.876" v="1064" actId="1076"/>
       <pc:docMkLst>
         <pc:docMk/>
       </pc:docMkLst>
       <pc:sldChg chg="modSp mod modTransition">
-        <pc:chgData name="Lav Dubey" userId="7279828d398a9119" providerId="LiveId" clId="{2AA98B38-00A7-4B61-BAF4-C8311D89AA21}" dt="2026-08-14T15:36:04.517" v="1025"/>
-        <pc:sldMkLst>
-          <pc:docMk/>
-          <pc:sldMk cId="2952923800" sldId="281"/>
-        </pc:sldMkLst>
-        <pc:spChg chg="mod">
-          <ac:chgData name="Lav Dubey" userId="7279828d398a9119" providerId="LiveId" clId="{2AA98B38-00A7-4B61-BAF4-C8311D89AA21}" dt="2026-08-13T09:16:13.016" v="933" actId="207"/>
-          <ac:spMkLst>
-            <pc:docMk/>
-            <pc:sldMk cId="2952923800" sldId="281"/>
-            <ac:spMk id="3" creationId="{A2E339BF-E6D7-DD0E-AF02-6813852EE723}"/>
-          </ac:spMkLst>
-        </pc:spChg>
-      </pc:sldChg>
-      <pc:sldChg chg="delSp modSp del mod">
-        <pc:chgData name="Lav Dubey" userId="7279828d398a9119" providerId="LiveId" clId="{2AA98B38-00A7-4B61-BAF4-C8311D89AA21}" dt="2026-08-13T09:10:29.999" v="921" actId="47"/>
-        <pc:sldMkLst>
-          <pc:docMk/>
-          <pc:sldMk cId="685681062" sldId="282"/>
-        </pc:sldMkLst>
-        <pc:spChg chg="mod">
-          <ac:chgData name="Lav Dubey" userId="7279828d398a9119" providerId="LiveId" clId="{2AA98B38-00A7-4B61-BAF4-C8311D89AA21}" dt="2026-08-13T07:34:01.210" v="495" actId="1076"/>
-          <ac:spMkLst>
-            <pc:docMk/>
-            <pc:sldMk cId="685681062" sldId="282"/>
-            <ac:spMk id="2" creationId="{FD5E8954-9BCB-7FD9-A210-38DC54382D45}"/>
-          </ac:spMkLst>
-        </pc:spChg>
-        <pc:spChg chg="mod">
-          <ac:chgData name="Lav Dubey" userId="7279828d398a9119" providerId="LiveId" clId="{2AA98B38-00A7-4B61-BAF4-C8311D89AA21}" dt="2026-08-13T07:34:17.603" v="500" actId="14100"/>
-          <ac:spMkLst>
-            <pc:docMk/>
-            <pc:sldMk cId="685681062" sldId="282"/>
-            <ac:spMk id="3" creationId="{75111C33-898C-4414-4665-5136EB6FC126}"/>
-          </ac:spMkLst>
-        </pc:spChg>
-        <pc:spChg chg="del mod">
-          <ac:chgData name="Lav Dubey" userId="7279828d398a9119" providerId="LiveId" clId="{2AA98B38-00A7-4B61-BAF4-C8311D89AA21}" dt="2026-08-13T07:34:06.978" v="497" actId="478"/>
-          <ac:spMkLst>
-            <pc:docMk/>
-            <pc:sldMk cId="685681062" sldId="282"/>
-            <ac:spMk id="23" creationId="{94FF72B7-0438-3641-5939-75128934B0DF}"/>
-          </ac:spMkLst>
-        </pc:spChg>
-      </pc:sldChg>
-      <pc:sldChg chg="modSp mod modTransition">
-        <pc:chgData name="Lav Dubey" userId="7279828d398a9119" providerId="LiveId" clId="{2AA98B38-00A7-4B61-BAF4-C8311D89AA21}" dt="2026-08-14T15:36:04.517" v="1025"/>
-        <pc:sldMkLst>
-          <pc:docMk/>
-          <pc:sldMk cId="1973173046" sldId="297"/>
-        </pc:sldMkLst>
-        <pc:spChg chg="mod">
-          <ac:chgData name="Lav Dubey" userId="7279828d398a9119" providerId="LiveId" clId="{2AA98B38-00A7-4B61-BAF4-C8311D89AA21}" dt="2026-08-13T09:05:14.676" v="880" actId="122"/>
-          <ac:spMkLst>
-            <pc:docMk/>
-            <pc:sldMk cId="1973173046" sldId="297"/>
-            <ac:spMk id="2" creationId="{509D22C5-0C9E-B582-A8FE-B45E70A01E7F}"/>
-          </ac:spMkLst>
-        </pc:spChg>
-        <pc:spChg chg="mod">
-          <ac:chgData name="Lav Dubey" userId="7279828d398a9119" providerId="LiveId" clId="{2AA98B38-00A7-4B61-BAF4-C8311D89AA21}" dt="2026-08-13T09:35:08.360" v="984" actId="14100"/>
-          <ac:spMkLst>
-            <pc:docMk/>
-            <pc:sldMk cId="1973173046" sldId="297"/>
-            <ac:spMk id="3" creationId="{D8B5CEF2-E667-BBB5-2EA6-C06F93B6DE12}"/>
-          </ac:spMkLst>
-        </pc:spChg>
-      </pc:sldChg>
-      <pc:sldChg chg="modSp mod modTransition">
-        <pc:chgData name="Lav Dubey" userId="7279828d398a9119" providerId="LiveId" clId="{2AA98B38-00A7-4B61-BAF4-C8311D89AA21}" dt="2026-08-14T15:36:04.517" v="1025"/>
-        <pc:sldMkLst>
-          <pc:docMk/>
-          <pc:sldMk cId="3913219759" sldId="304"/>
-        </pc:sldMkLst>
-        <pc:spChg chg="mod">
-          <ac:chgData name="Lav Dubey" userId="7279828d398a9119" providerId="LiveId" clId="{2AA98B38-00A7-4B61-BAF4-C8311D89AA21}" dt="2026-08-13T09:07:16.199" v="920" actId="27636"/>
-          <ac:spMkLst>
-            <pc:docMk/>
-            <pc:sldMk cId="3913219759" sldId="304"/>
-            <ac:spMk id="3" creationId="{D4D22962-3C7F-E480-5C35-7F4860A098E1}"/>
-          </ac:spMkLst>
-        </pc:spChg>
-      </pc:sldChg>
-      <pc:sldChg chg="modSp mod modTransition">
-        <pc:chgData name="Lav Dubey" userId="7279828d398a9119" providerId="LiveId" clId="{2AA98B38-00A7-4B61-BAF4-C8311D89AA21}" dt="2026-08-14T15:36:04.517" v="1025"/>
-        <pc:sldMkLst>
-          <pc:docMk/>
-          <pc:sldMk cId="2906491918" sldId="307"/>
-        </pc:sldMkLst>
-        <pc:spChg chg="mod">
-          <ac:chgData name="Lav Dubey" userId="7279828d398a9119" providerId="LiveId" clId="{2AA98B38-00A7-4B61-BAF4-C8311D89AA21}" dt="2026-08-13T09:17:20.625" v="938" actId="207"/>
-          <ac:spMkLst>
-            <pc:docMk/>
-            <pc:sldMk cId="2906491918" sldId="307"/>
-            <ac:spMk id="5" creationId="{BD326677-DA45-2EC2-0B4A-1E70B0427841}"/>
-          </ac:spMkLst>
-        </pc:spChg>
-      </pc:sldChg>
-      <pc:sldChg chg="modTransition">
-        <pc:chgData name="Lav Dubey" userId="7279828d398a9119" providerId="LiveId" clId="{2AA98B38-00A7-4B61-BAF4-C8311D89AA21}" dt="2026-08-14T15:36:04.517" v="1025"/>
+        <pc:chgData name="Lav Dubey" userId="7279828d398a9119" providerId="LiveId" clId="{2AA98B38-00A7-4B61-BAF4-C8311D89AA21}" dt="2026-10-04T07:08:45.876" v="1064" actId="1076"/>
         <pc:sldMkLst>
           <pc:docMk/>
           <pc:sldMk cId="2202437675" sldId="312"/>
         </pc:sldMkLst>
-      </pc:sldChg>
-      <pc:sldChg chg="del">
-        <pc:chgData name="Lav Dubey" userId="7279828d398a9119" providerId="LiveId" clId="{2AA98B38-00A7-4B61-BAF4-C8311D89AA21}" dt="2026-08-13T09:05:46.114" v="882" actId="2696"/>
-        <pc:sldMkLst>
-          <pc:docMk/>
-          <pc:sldMk cId="1131718056" sldId="314"/>
-        </pc:sldMkLst>
-      </pc:sldChg>
-      <pc:sldChg chg="del">
-        <pc:chgData name="Lav Dubey" userId="7279828d398a9119" providerId="LiveId" clId="{2AA98B38-00A7-4B61-BAF4-C8311D89AA21}" dt="2026-08-13T09:05:50.883" v="883" actId="2696"/>
-        <pc:sldMkLst>
-          <pc:docMk/>
-          <pc:sldMk cId="2468595790" sldId="315"/>
-        </pc:sldMkLst>
-      </pc:sldChg>
-      <pc:sldChg chg="addSp delSp modSp mod modTransition">
-        <pc:chgData name="Lav Dubey" userId="7279828d398a9119" providerId="LiveId" clId="{2AA98B38-00A7-4B61-BAF4-C8311D89AA21}" dt="2026-08-14T15:36:04.517" v="1025"/>
-        <pc:sldMkLst>
-          <pc:docMk/>
-          <pc:sldMk cId="1941619646" sldId="317"/>
-        </pc:sldMkLst>
-        <pc:spChg chg="add del mod">
-          <ac:chgData name="Lav Dubey" userId="7279828d398a9119" providerId="LiveId" clId="{2AA98B38-00A7-4B61-BAF4-C8311D89AA21}" dt="2026-08-14T15:31:46.734" v="1007"/>
+        <pc:spChg chg="mod">
+          <ac:chgData name="Lav Dubey" userId="7279828d398a9119" providerId="LiveId" clId="{2AA98B38-00A7-4B61-BAF4-C8311D89AA21}" dt="2026-10-04T07:08:45.876" v="1064" actId="1076"/>
           <ac:spMkLst>
             <pc:docMk/>
-            <pc:sldMk cId="1941619646" sldId="317"/>
-            <ac:spMk id="2" creationId="{18F042AA-F471-FC51-4E0F-C96B330C0BC4}"/>
-          </ac:spMkLst>
-        </pc:spChg>
-        <pc:spChg chg="mod">
-          <ac:chgData name="Lav Dubey" userId="7279828d398a9119" providerId="LiveId" clId="{2AA98B38-00A7-4B61-BAF4-C8311D89AA21}" dt="2026-08-13T08:33:57.738" v="854" actId="1076"/>
-          <ac:spMkLst>
-            <pc:docMk/>
-            <pc:sldMk cId="1941619646" sldId="317"/>
-            <ac:spMk id="3" creationId="{3D55F2D4-C20E-BEBC-1CCF-4449B0456A7E}"/>
-          </ac:spMkLst>
-        </pc:spChg>
-        <pc:spChg chg="add del mod">
-          <ac:chgData name="Lav Dubey" userId="7279828d398a9119" providerId="LiveId" clId="{2AA98B38-00A7-4B61-BAF4-C8311D89AA21}" dt="2026-08-14T15:31:52.685" v="1010" actId="478"/>
-          <ac:spMkLst>
-            <pc:docMk/>
-            <pc:sldMk cId="1941619646" sldId="317"/>
-            <ac:spMk id="4" creationId="{97A5AC9B-0310-8426-ECE2-AF7F8EB0EBC5}"/>
-          </ac:spMkLst>
-        </pc:spChg>
-        <pc:spChg chg="del mod">
-          <ac:chgData name="Lav Dubey" userId="7279828d398a9119" providerId="LiveId" clId="{2AA98B38-00A7-4B61-BAF4-C8311D89AA21}" dt="2026-08-13T08:34:02.652" v="856" actId="478"/>
-          <ac:spMkLst>
-            <pc:docMk/>
-            <pc:sldMk cId="1941619646" sldId="317"/>
-            <ac:spMk id="4" creationId="{C82CE1B8-1C92-D6D2-444B-652DB90E86D1}"/>
-          </ac:spMkLst>
-        </pc:spChg>
-        <pc:spChg chg="add mod">
-          <ac:chgData name="Lav Dubey" userId="7279828d398a9119" providerId="LiveId" clId="{2AA98B38-00A7-4B61-BAF4-C8311D89AA21}" dt="2026-08-13T09:31:24.022" v="974" actId="2711"/>
-          <ac:spMkLst>
-            <pc:docMk/>
-            <pc:sldMk cId="1941619646" sldId="317"/>
-            <ac:spMk id="5" creationId="{236555C3-AD5D-E8C6-28E9-1B734707DBAE}"/>
-          </ac:spMkLst>
-        </pc:spChg>
-        <pc:spChg chg="add del mod">
-          <ac:chgData name="Lav Dubey" userId="7279828d398a9119" providerId="LiveId" clId="{2AA98B38-00A7-4B61-BAF4-C8311D89AA21}" dt="2026-08-13T08:33:32.861" v="835" actId="478"/>
-          <ac:spMkLst>
-            <pc:docMk/>
-            <pc:sldMk cId="1941619646" sldId="317"/>
-            <ac:spMk id="7" creationId="{B4C717F7-0338-759C-B5B1-F252C26D5466}"/>
-          </ac:spMkLst>
-        </pc:spChg>
-        <pc:spChg chg="del">
-          <ac:chgData name="Lav Dubey" userId="7279828d398a9119" providerId="LiveId" clId="{2AA98B38-00A7-4B61-BAF4-C8311D89AA21}" dt="2026-08-13T08:33:30.455" v="834" actId="478"/>
-          <ac:spMkLst>
-            <pc:docMk/>
-            <pc:sldMk cId="1941619646" sldId="317"/>
-            <ac:spMk id="13" creationId="{58AC0C8B-8A7A-9FAE-2D0F-4D1C3A8C3FA5}"/>
-          </ac:spMkLst>
-        </pc:spChg>
-        <pc:spChg chg="del">
-          <ac:chgData name="Lav Dubey" userId="7279828d398a9119" providerId="LiveId" clId="{2AA98B38-00A7-4B61-BAF4-C8311D89AA21}" dt="2026-08-13T08:33:26.821" v="833" actId="478"/>
-          <ac:spMkLst>
-            <pc:docMk/>
-            <pc:sldMk cId="1941619646" sldId="317"/>
-            <ac:spMk id="14" creationId="{749C7CD1-A9AA-49E3-6734-AD9546F2DF5B}"/>
-          </ac:spMkLst>
-        </pc:spChg>
-        <pc:picChg chg="mod modCrop">
-          <ac:chgData name="Lav Dubey" userId="7279828d398a9119" providerId="LiveId" clId="{2AA98B38-00A7-4B61-BAF4-C8311D89AA21}" dt="2026-08-13T08:36:57.806" v="866" actId="14100"/>
-          <ac:picMkLst>
-            <pc:docMk/>
-            <pc:sldMk cId="1941619646" sldId="317"/>
-            <ac:picMk id="10" creationId="{DD0A0899-5B02-CEB5-E5DD-448B169C2377}"/>
-          </ac:picMkLst>
-        </pc:picChg>
-      </pc:sldChg>
-      <pc:sldChg chg="del">
-        <pc:chgData name="Lav Dubey" userId="7279828d398a9119" providerId="LiveId" clId="{2AA98B38-00A7-4B61-BAF4-C8311D89AA21}" dt="2026-08-13T09:05:58.752" v="884" actId="2696"/>
-        <pc:sldMkLst>
-          <pc:docMk/>
-          <pc:sldMk cId="4072101725" sldId="318"/>
-        </pc:sldMkLst>
-      </pc:sldChg>
-      <pc:sldChg chg="del">
-        <pc:chgData name="Lav Dubey" userId="7279828d398a9119" providerId="LiveId" clId="{2AA98B38-00A7-4B61-BAF4-C8311D89AA21}" dt="2026-08-13T09:06:02.217" v="885" actId="2696"/>
-        <pc:sldMkLst>
-          <pc:docMk/>
-          <pc:sldMk cId="3969996159" sldId="319"/>
-        </pc:sldMkLst>
-      </pc:sldChg>
-      <pc:sldChg chg="del">
-        <pc:chgData name="Lav Dubey" userId="7279828d398a9119" providerId="LiveId" clId="{2AA98B38-00A7-4B61-BAF4-C8311D89AA21}" dt="2026-08-13T09:06:09.359" v="886" actId="2696"/>
-        <pc:sldMkLst>
-          <pc:docMk/>
-          <pc:sldMk cId="2498021601" sldId="321"/>
-        </pc:sldMkLst>
-      </pc:sldChg>
-      <pc:sldChg chg="addSp delSp modSp mod modTransition">
-        <pc:chgData name="Lav Dubey" userId="7279828d398a9119" providerId="LiveId" clId="{2AA98B38-00A7-4B61-BAF4-C8311D89AA21}" dt="2026-08-14T15:36:04.517" v="1025"/>
-        <pc:sldMkLst>
-          <pc:docMk/>
-          <pc:sldMk cId="1686213229" sldId="322"/>
-        </pc:sldMkLst>
-        <pc:spChg chg="mod">
-          <ac:chgData name="Lav Dubey" userId="7279828d398a9119" providerId="LiveId" clId="{2AA98B38-00A7-4B61-BAF4-C8311D89AA21}" dt="2026-08-13T07:51:13.315" v="525" actId="1076"/>
-          <ac:spMkLst>
-            <pc:docMk/>
-            <pc:sldMk cId="1686213229" sldId="322"/>
-            <ac:spMk id="2" creationId="{4730A324-0737-F0DA-1F7D-10CBE06D7C3F}"/>
-          </ac:spMkLst>
-        </pc:spChg>
-        <pc:spChg chg="del mod">
-          <ac:chgData name="Lav Dubey" userId="7279828d398a9119" providerId="LiveId" clId="{2AA98B38-00A7-4B61-BAF4-C8311D89AA21}" dt="2026-08-13T07:49:18.703" v="504" actId="478"/>
-          <ac:spMkLst>
-            <pc:docMk/>
-            <pc:sldMk cId="1686213229" sldId="322"/>
-            <ac:spMk id="3" creationId="{AC21286A-7B29-3B58-1636-0F45723890AB}"/>
-          </ac:spMkLst>
-        </pc:spChg>
-        <pc:spChg chg="add del mod">
-          <ac:chgData name="Lav Dubey" userId="7279828d398a9119" providerId="LiveId" clId="{2AA98B38-00A7-4B61-BAF4-C8311D89AA21}" dt="2026-08-13T07:50:48.608" v="505" actId="931"/>
-          <ac:spMkLst>
-            <pc:docMk/>
-            <pc:sldMk cId="1686213229" sldId="322"/>
-            <ac:spMk id="6" creationId="{12268442-BBC5-54DC-959A-E8A57B9FDDB8}"/>
-          </ac:spMkLst>
-        </pc:spChg>
-        <pc:graphicFrameChg chg="del modGraphic">
-          <ac:chgData name="Lav Dubey" userId="7279828d398a9119" providerId="LiveId" clId="{2AA98B38-00A7-4B61-BAF4-C8311D89AA21}" dt="2026-08-13T07:49:04.745" v="502" actId="478"/>
-          <ac:graphicFrameMkLst>
-            <pc:docMk/>
-            <pc:sldMk cId="1686213229" sldId="322"/>
-            <ac:graphicFrameMk id="5" creationId="{AC0C7FF8-9CAF-6C67-C1E5-AF40401D0B3D}"/>
-          </ac:graphicFrameMkLst>
-        </pc:graphicFrameChg>
-        <pc:picChg chg="add mod ord">
-          <ac:chgData name="Lav Dubey" userId="7279828d398a9119" providerId="LiveId" clId="{2AA98B38-00A7-4B61-BAF4-C8311D89AA21}" dt="2026-08-13T07:51:24.463" v="527" actId="14100"/>
-          <ac:picMkLst>
-            <pc:docMk/>
-            <pc:sldMk cId="1686213229" sldId="322"/>
-            <ac:picMk id="8" creationId="{C56B0F64-79F6-DC65-3C6A-9ADB9C41C00A}"/>
-          </ac:picMkLst>
-        </pc:picChg>
-      </pc:sldChg>
-      <pc:sldChg chg="modSp mod modTransition">
-        <pc:chgData name="Lav Dubey" userId="7279828d398a9119" providerId="LiveId" clId="{2AA98B38-00A7-4B61-BAF4-C8311D89AA21}" dt="2026-08-14T15:36:04.517" v="1025"/>
-        <pc:sldMkLst>
-          <pc:docMk/>
-          <pc:sldMk cId="2240404864" sldId="323"/>
-        </pc:sldMkLst>
-        <pc:spChg chg="mod">
-          <ac:chgData name="Lav Dubey" userId="7279828d398a9119" providerId="LiveId" clId="{2AA98B38-00A7-4B61-BAF4-C8311D89AA21}" dt="2026-08-13T09:16:18.899" v="934" actId="207"/>
-          <ac:spMkLst>
-            <pc:docMk/>
-            <pc:sldMk cId="2240404864" sldId="323"/>
-            <ac:spMk id="3" creationId="{FCB65BCB-4F98-7A62-68CA-3F19C8D0EF33}"/>
+            <pc:sldMk cId="2202437675" sldId="312"/>
+            <ac:spMk id="4" creationId="{533B5759-1A5E-CFED-0ED6-A4FAD4E6D296}"/>
           </ac:spMkLst>
         </pc:spChg>
       </pc:sldChg>
-      <pc:sldChg chg="addSp delSp modSp mod modTransition">
-        <pc:chgData name="Lav Dubey" userId="7279828d398a9119" providerId="LiveId" clId="{2AA98B38-00A7-4B61-BAF4-C8311D89AA21}" dt="2026-08-14T15:36:04.517" v="1025"/>
-        <pc:sldMkLst>
-          <pc:docMk/>
-          <pc:sldMk cId="3150439435" sldId="324"/>
-        </pc:sldMkLst>
-        <pc:spChg chg="mod">
-          <ac:chgData name="Lav Dubey" userId="7279828d398a9119" providerId="LiveId" clId="{2AA98B38-00A7-4B61-BAF4-C8311D89AA21}" dt="2026-08-12T18:39:09.386" v="34" actId="20577"/>
-          <ac:spMkLst>
-            <pc:docMk/>
-            <pc:sldMk cId="3150439435" sldId="324"/>
-            <ac:spMk id="2" creationId="{25AA3324-D2B3-E785-C655-0EA7BE462CDE}"/>
-          </ac:spMkLst>
-        </pc:spChg>
-        <pc:spChg chg="mod">
-          <ac:chgData name="Lav Dubey" userId="7279828d398a9119" providerId="LiveId" clId="{2AA98B38-00A7-4B61-BAF4-C8311D89AA21}" dt="2026-08-13T09:16:24.247" v="935" actId="207"/>
-          <ac:spMkLst>
-            <pc:docMk/>
-            <pc:sldMk cId="3150439435" sldId="324"/>
-            <ac:spMk id="3" creationId="{CD01859B-3A58-BC42-7735-AC9B83801598}"/>
-          </ac:spMkLst>
-        </pc:spChg>
-        <pc:picChg chg="add mod ord modCrop">
-          <ac:chgData name="Lav Dubey" userId="7279828d398a9119" providerId="LiveId" clId="{2AA98B38-00A7-4B61-BAF4-C8311D89AA21}" dt="2026-08-12T18:43:31.098" v="55" actId="14100"/>
-          <ac:picMkLst>
-            <pc:docMk/>
-            <pc:sldMk cId="3150439435" sldId="324"/>
-            <ac:picMk id="8" creationId="{6964720E-2AA3-6B8C-A772-146E226F702E}"/>
-          </ac:picMkLst>
-        </pc:picChg>
-      </pc:sldChg>
-      <pc:sldChg chg="modSp add mod modTransition">
-        <pc:chgData name="Lav Dubey" userId="7279828d398a9119" providerId="LiveId" clId="{2AA98B38-00A7-4B61-BAF4-C8311D89AA21}" dt="2026-08-14T15:36:04.517" v="1025"/>
-        <pc:sldMkLst>
-          <pc:docMk/>
-          <pc:sldMk cId="3980289222" sldId="325"/>
-        </pc:sldMkLst>
-        <pc:spChg chg="mod">
-          <ac:chgData name="Lav Dubey" userId="7279828d398a9119" providerId="LiveId" clId="{2AA98B38-00A7-4B61-BAF4-C8311D89AA21}" dt="2026-08-12T18:56:07.148" v="109" actId="20577"/>
-          <ac:spMkLst>
-            <pc:docMk/>
-            <pc:sldMk cId="3980289222" sldId="325"/>
-            <ac:spMk id="2" creationId="{CA465EA5-2D9A-C440-2B8F-792569C55F56}"/>
-          </ac:spMkLst>
-        </pc:spChg>
-        <pc:spChg chg="mod">
-          <ac:chgData name="Lav Dubey" userId="7279828d398a9119" providerId="LiveId" clId="{2AA98B38-00A7-4B61-BAF4-C8311D89AA21}" dt="2026-08-13T09:16:29.079" v="936" actId="207"/>
-          <ac:spMkLst>
-            <pc:docMk/>
-            <pc:sldMk cId="3980289222" sldId="325"/>
-            <ac:spMk id="3" creationId="{8F26E6F9-A46B-3FB5-B9AB-0FF632404477}"/>
-          </ac:spMkLst>
-        </pc:spChg>
-        <pc:picChg chg="mod modCrop">
-          <ac:chgData name="Lav Dubey" userId="7279828d398a9119" providerId="LiveId" clId="{2AA98B38-00A7-4B61-BAF4-C8311D89AA21}" dt="2026-08-12T18:57:06.389" v="118" actId="14100"/>
-          <ac:picMkLst>
-            <pc:docMk/>
-            <pc:sldMk cId="3980289222" sldId="325"/>
-            <ac:picMk id="8" creationId="{0766AACE-8239-A3FD-8A59-107DA0243CEE}"/>
-          </ac:picMkLst>
-        </pc:picChg>
-      </pc:sldChg>
-      <pc:sldChg chg="addSp modSp add mod modTransition">
-        <pc:chgData name="Lav Dubey" userId="7279828d398a9119" providerId="LiveId" clId="{2AA98B38-00A7-4B61-BAF4-C8311D89AA21}" dt="2026-08-14T15:36:04.517" v="1025"/>
-        <pc:sldMkLst>
-          <pc:docMk/>
-          <pc:sldMk cId="1984739382" sldId="326"/>
-        </pc:sldMkLst>
-        <pc:spChg chg="mod">
-          <ac:chgData name="Lav Dubey" userId="7279828d398a9119" providerId="LiveId" clId="{2AA98B38-00A7-4B61-BAF4-C8311D89AA21}" dt="2026-08-12T19:06:24.897" v="198" actId="20577"/>
-          <ac:spMkLst>
-            <pc:docMk/>
-            <pc:sldMk cId="1984739382" sldId="326"/>
-            <ac:spMk id="2" creationId="{C4B1349A-9C5B-9E8D-D25D-A93AAF98F661}"/>
-          </ac:spMkLst>
-        </pc:spChg>
-        <pc:spChg chg="mod">
-          <ac:chgData name="Lav Dubey" userId="7279828d398a9119" providerId="LiveId" clId="{2AA98B38-00A7-4B61-BAF4-C8311D89AA21}" dt="2026-08-12T19:20:21.643" v="350" actId="5793"/>
-          <ac:spMkLst>
-            <pc:docMk/>
-            <pc:sldMk cId="1984739382" sldId="326"/>
-            <ac:spMk id="3" creationId="{887A7EE8-3080-EC75-F655-1851A765B502}"/>
-          </ac:spMkLst>
-        </pc:spChg>
-        <pc:picChg chg="add mod">
-          <ac:chgData name="Lav Dubey" userId="7279828d398a9119" providerId="LiveId" clId="{2AA98B38-00A7-4B61-BAF4-C8311D89AA21}" dt="2026-08-12T19:11:21.435" v="241" actId="1036"/>
-          <ac:picMkLst>
-            <pc:docMk/>
-            <pc:sldMk cId="1984739382" sldId="326"/>
-            <ac:picMk id="5" creationId="{509E9131-A868-EBDD-FD4D-B5FCDA66FDC6}"/>
-          </ac:picMkLst>
-        </pc:picChg>
-        <pc:picChg chg="add mod">
-          <ac:chgData name="Lav Dubey" userId="7279828d398a9119" providerId="LiveId" clId="{2AA98B38-00A7-4B61-BAF4-C8311D89AA21}" dt="2026-08-12T19:11:41.968" v="278" actId="1038"/>
-          <ac:picMkLst>
-            <pc:docMk/>
-            <pc:sldMk cId="1984739382" sldId="326"/>
-            <ac:picMk id="7" creationId="{B8650791-2342-6F2B-9C38-660C242097E5}"/>
-          </ac:picMkLst>
-        </pc:picChg>
-        <pc:picChg chg="mod modCrop">
-          <ac:chgData name="Lav Dubey" userId="7279828d398a9119" providerId="LiveId" clId="{2AA98B38-00A7-4B61-BAF4-C8311D89AA21}" dt="2026-08-12T19:09:22.184" v="207" actId="1076"/>
-          <ac:picMkLst>
-            <pc:docMk/>
-            <pc:sldMk cId="1984739382" sldId="326"/>
-            <ac:picMk id="8" creationId="{9BF12033-294E-1CF2-ACA9-309709A7DC5A}"/>
-          </ac:picMkLst>
-        </pc:picChg>
-      </pc:sldChg>
-      <pc:sldChg chg="modSp add mod ord modTransition">
-        <pc:chgData name="Lav Dubey" userId="7279828d398a9119" providerId="LiveId" clId="{2AA98B38-00A7-4B61-BAF4-C8311D89AA21}" dt="2026-08-14T15:36:04.517" v="1025"/>
-        <pc:sldMkLst>
-          <pc:docMk/>
-          <pc:sldMk cId="86707652" sldId="327"/>
-        </pc:sldMkLst>
-        <pc:spChg chg="mod">
-          <ac:chgData name="Lav Dubey" userId="7279828d398a9119" providerId="LiveId" clId="{2AA98B38-00A7-4B61-BAF4-C8311D89AA21}" dt="2026-08-12T19:22:32.751" v="388" actId="20577"/>
-          <ac:spMkLst>
-            <pc:docMk/>
-            <pc:sldMk cId="86707652" sldId="327"/>
-            <ac:spMk id="2" creationId="{7613A646-8C05-35B6-EA12-8B42B122EEC6}"/>
-          </ac:spMkLst>
-        </pc:spChg>
-        <pc:spChg chg="mod">
-          <ac:chgData name="Lav Dubey" userId="7279828d398a9119" providerId="LiveId" clId="{2AA98B38-00A7-4B61-BAF4-C8311D89AA21}" dt="2026-08-13T09:16:45.753" v="937" actId="207"/>
-          <ac:spMkLst>
-            <pc:docMk/>
-            <pc:sldMk cId="86707652" sldId="327"/>
-            <ac:spMk id="3" creationId="{F9AD32DC-BC70-86A3-5B46-210DE1D26904}"/>
-          </ac:spMkLst>
-        </pc:spChg>
-        <pc:picChg chg="mod">
-          <ac:chgData name="Lav Dubey" userId="7279828d398a9119" providerId="LiveId" clId="{2AA98B38-00A7-4B61-BAF4-C8311D89AA21}" dt="2026-08-12T19:23:28.411" v="393" actId="14100"/>
-          <ac:picMkLst>
-            <pc:docMk/>
-            <pc:sldMk cId="86707652" sldId="327"/>
-            <ac:picMk id="8" creationId="{356D79A6-7370-4FE9-EA29-5A6EA867B6CB}"/>
-          </ac:picMkLst>
-        </pc:picChg>
-      </pc:sldChg>
-      <pc:sldChg chg="modSp add mod modTransition">
-        <pc:chgData name="Lav Dubey" userId="7279828d398a9119" providerId="LiveId" clId="{2AA98B38-00A7-4B61-BAF4-C8311D89AA21}" dt="2026-08-14T15:36:04.517" v="1025"/>
-        <pc:sldMkLst>
-          <pc:docMk/>
-          <pc:sldMk cId="1195062101" sldId="328"/>
-        </pc:sldMkLst>
-        <pc:spChg chg="mod">
-          <ac:chgData name="Lav Dubey" userId="7279828d398a9119" providerId="LiveId" clId="{2AA98B38-00A7-4B61-BAF4-C8311D89AA21}" dt="2026-08-13T07:27:00.730" v="453" actId="20577"/>
-          <ac:spMkLst>
-            <pc:docMk/>
-            <pc:sldMk cId="1195062101" sldId="328"/>
-            <ac:spMk id="2" creationId="{82BCDC59-29B8-0AEE-BE28-07ECD24489A9}"/>
-          </ac:spMkLst>
-        </pc:spChg>
-        <pc:spChg chg="mod">
-          <ac:chgData name="Lav Dubey" userId="7279828d398a9119" providerId="LiveId" clId="{2AA98B38-00A7-4B61-BAF4-C8311D89AA21}" dt="2026-08-13T09:15:13.595" v="932" actId="20577"/>
-          <ac:spMkLst>
-            <pc:docMk/>
-            <pc:sldMk cId="1195062101" sldId="328"/>
-            <ac:spMk id="3" creationId="{15A9F072-6DC9-2FAB-9AE6-A2E39BFE53C0}"/>
-          </ac:spMkLst>
-        </pc:spChg>
-        <pc:picChg chg="mod">
-          <ac:chgData name="Lav Dubey" userId="7279828d398a9119" providerId="LiveId" clId="{2AA98B38-00A7-4B61-BAF4-C8311D89AA21}" dt="2026-08-13T07:23:22.552" v="421" actId="1037"/>
-          <ac:picMkLst>
-            <pc:docMk/>
-            <pc:sldMk cId="1195062101" sldId="328"/>
-            <ac:picMk id="8" creationId="{BDA068C4-B413-3A70-C732-F3D32C5FA06A}"/>
-          </ac:picMkLst>
-        </pc:picChg>
-      </pc:sldChg>
-      <pc:sldChg chg="addSp delSp modSp add mod modTransition">
-        <pc:chgData name="Lav Dubey" userId="7279828d398a9119" providerId="LiveId" clId="{2AA98B38-00A7-4B61-BAF4-C8311D89AA21}" dt="2026-08-14T15:36:04.517" v="1025"/>
-        <pc:sldMkLst>
-          <pc:docMk/>
-          <pc:sldMk cId="2299251222" sldId="329"/>
-        </pc:sldMkLst>
-        <pc:spChg chg="mod">
-          <ac:chgData name="Lav Dubey" userId="7279828d398a9119" providerId="LiveId" clId="{2AA98B38-00A7-4B61-BAF4-C8311D89AA21}" dt="2026-08-13T07:57:03.382" v="559" actId="20577"/>
-          <ac:spMkLst>
-            <pc:docMk/>
-            <pc:sldMk cId="2299251222" sldId="329"/>
-            <ac:spMk id="2" creationId="{BC23D8D0-5D04-FCA7-A804-F2855E33C765}"/>
-          </ac:spMkLst>
-        </pc:spChg>
-        <pc:spChg chg="add del mod">
-          <ac:chgData name="Lav Dubey" userId="7279828d398a9119" providerId="LiveId" clId="{2AA98B38-00A7-4B61-BAF4-C8311D89AA21}" dt="2026-08-13T07:54:48.205" v="530" actId="931"/>
-          <ac:spMkLst>
-            <pc:docMk/>
-            <pc:sldMk cId="2299251222" sldId="329"/>
-            <ac:spMk id="4" creationId="{39F3CE19-E83F-1399-4464-2C47C809D55E}"/>
-          </ac:spMkLst>
-        </pc:spChg>
-        <pc:picChg chg="add mod ord">
-          <ac:chgData name="Lav Dubey" userId="7279828d398a9119" providerId="LiveId" clId="{2AA98B38-00A7-4B61-BAF4-C8311D89AA21}" dt="2026-08-13T07:56:24.111" v="544" actId="1076"/>
-          <ac:picMkLst>
-            <pc:docMk/>
-            <pc:sldMk cId="2299251222" sldId="329"/>
-            <ac:picMk id="6" creationId="{24419E51-E714-9E18-64D1-EB122AC4AA97}"/>
-          </ac:picMkLst>
-        </pc:picChg>
-        <pc:picChg chg="del">
-          <ac:chgData name="Lav Dubey" userId="7279828d398a9119" providerId="LiveId" clId="{2AA98B38-00A7-4B61-BAF4-C8311D89AA21}" dt="2026-08-13T07:54:34.656" v="529" actId="478"/>
-          <ac:picMkLst>
-            <pc:docMk/>
-            <pc:sldMk cId="2299251222" sldId="329"/>
-            <ac:picMk id="8" creationId="{5C93E3FF-B04F-A219-8089-64641855A864}"/>
-          </ac:picMkLst>
-        </pc:picChg>
-        <pc:picChg chg="add mod">
-          <ac:chgData name="Lav Dubey" userId="7279828d398a9119" providerId="LiveId" clId="{2AA98B38-00A7-4B61-BAF4-C8311D89AA21}" dt="2026-08-13T07:56:46.508" v="548" actId="1076"/>
-          <ac:picMkLst>
-            <pc:docMk/>
-            <pc:sldMk cId="2299251222" sldId="329"/>
-            <ac:picMk id="9" creationId="{BC791C99-6D0D-4907-7251-7A9660C8F401}"/>
-          </ac:picMkLst>
-        </pc:picChg>
-      </pc:sldChg>
-      <pc:sldChg chg="modSp add mod modTransition">
-        <pc:chgData name="Lav Dubey" userId="7279828d398a9119" providerId="LiveId" clId="{2AA98B38-00A7-4B61-BAF4-C8311D89AA21}" dt="2026-08-14T15:36:04.517" v="1025"/>
-        <pc:sldMkLst>
-          <pc:docMk/>
-          <pc:sldMk cId="719072421" sldId="330"/>
-        </pc:sldMkLst>
-        <pc:spChg chg="mod">
-          <ac:chgData name="Lav Dubey" userId="7279828d398a9119" providerId="LiveId" clId="{2AA98B38-00A7-4B61-BAF4-C8311D89AA21}" dt="2026-08-13T07:59:15.895" v="594" actId="20577"/>
-          <ac:spMkLst>
-            <pc:docMk/>
-            <pc:sldMk cId="719072421" sldId="330"/>
-            <ac:spMk id="2" creationId="{2EA63C85-0AD6-837B-D17B-B40BF265A02A}"/>
-          </ac:spMkLst>
-        </pc:spChg>
-        <pc:picChg chg="mod">
-          <ac:chgData name="Lav Dubey" userId="7279828d398a9119" providerId="LiveId" clId="{2AA98B38-00A7-4B61-BAF4-C8311D89AA21}" dt="2026-08-13T07:58:22.968" v="561" actId="14826"/>
-          <ac:picMkLst>
-            <pc:docMk/>
-            <pc:sldMk cId="719072421" sldId="330"/>
-            <ac:picMk id="6" creationId="{5AAF9A14-61B2-CC45-4F8C-FF5163CE0B15}"/>
-          </ac:picMkLst>
-        </pc:picChg>
-        <pc:picChg chg="mod">
-          <ac:chgData name="Lav Dubey" userId="7279828d398a9119" providerId="LiveId" clId="{2AA98B38-00A7-4B61-BAF4-C8311D89AA21}" dt="2026-08-13T07:58:48.721" v="565" actId="14100"/>
-          <ac:picMkLst>
-            <pc:docMk/>
-            <pc:sldMk cId="719072421" sldId="330"/>
-            <ac:picMk id="9" creationId="{F263C4FD-2CD2-8A08-9896-D442C38FE2BC}"/>
-          </ac:picMkLst>
-        </pc:picChg>
-      </pc:sldChg>
-      <pc:sldChg chg="addSp delSp modSp add mod modTransition">
-        <pc:chgData name="Lav Dubey" userId="7279828d398a9119" providerId="LiveId" clId="{2AA98B38-00A7-4B61-BAF4-C8311D89AA21}" dt="2026-08-14T15:36:04.517" v="1025"/>
-        <pc:sldMkLst>
-          <pc:docMk/>
-          <pc:sldMk cId="387597224" sldId="331"/>
-        </pc:sldMkLst>
-        <pc:spChg chg="mod">
-          <ac:chgData name="Lav Dubey" userId="7279828d398a9119" providerId="LiveId" clId="{2AA98B38-00A7-4B61-BAF4-C8311D89AA21}" dt="2026-08-13T08:32:24.662" v="832" actId="20577"/>
-          <ac:spMkLst>
-            <pc:docMk/>
-            <pc:sldMk cId="387597224" sldId="331"/>
-            <ac:spMk id="2" creationId="{3BF4F7F5-0267-0C84-95FC-ECC5096858C8}"/>
-          </ac:spMkLst>
-        </pc:spChg>
-        <pc:spChg chg="add del mod">
-          <ac:chgData name="Lav Dubey" userId="7279828d398a9119" providerId="LiveId" clId="{2AA98B38-00A7-4B61-BAF4-C8311D89AA21}" dt="2026-08-13T08:10:31.967" v="607" actId="478"/>
-          <ac:spMkLst>
-            <pc:docMk/>
-            <pc:sldMk cId="387597224" sldId="331"/>
-            <ac:spMk id="4" creationId="{C31F0D47-02D0-7DE6-C764-D868B5D8F24E}"/>
-          </ac:spMkLst>
-        </pc:spChg>
-        <pc:spChg chg="add del mod">
-          <ac:chgData name="Lav Dubey" userId="7279828d398a9119" providerId="LiveId" clId="{2AA98B38-00A7-4B61-BAF4-C8311D89AA21}" dt="2026-08-13T08:13:02.514" v="608" actId="931"/>
-          <ac:spMkLst>
-            <pc:docMk/>
-            <pc:sldMk cId="387597224" sldId="331"/>
-            <ac:spMk id="7" creationId="{CDD2F891-9C4E-7F1C-C2C6-3C6D80B41EC0}"/>
-          </ac:spMkLst>
-        </pc:spChg>
-        <pc:spChg chg="add del mod">
-          <ac:chgData name="Lav Dubey" userId="7279828d398a9119" providerId="LiveId" clId="{2AA98B38-00A7-4B61-BAF4-C8311D89AA21}" dt="2026-08-13T08:21:45.766" v="738" actId="478"/>
-          <ac:spMkLst>
-            <pc:docMk/>
-            <pc:sldMk cId="387597224" sldId="331"/>
-            <ac:spMk id="34" creationId="{DF15789A-8FAF-189F-7B4E-E516B20551E3}"/>
-          </ac:spMkLst>
-        </pc:spChg>
-        <pc:picChg chg="del">
-          <ac:chgData name="Lav Dubey" userId="7279828d398a9119" providerId="LiveId" clId="{2AA98B38-00A7-4B61-BAF4-C8311D89AA21}" dt="2026-08-13T08:08:44.058" v="596" actId="478"/>
-          <ac:picMkLst>
-            <pc:docMk/>
-            <pc:sldMk cId="387597224" sldId="331"/>
-            <ac:picMk id="6" creationId="{24F4D050-E3A4-77F9-B3E2-3E87BF1EB679}"/>
-          </ac:picMkLst>
-        </pc:picChg>
-        <pc:picChg chg="del">
-          <ac:chgData name="Lav Dubey" userId="7279828d398a9119" providerId="LiveId" clId="{2AA98B38-00A7-4B61-BAF4-C8311D89AA21}" dt="2026-08-13T08:08:50.562" v="597" actId="478"/>
-          <ac:picMkLst>
-            <pc:docMk/>
-            <pc:sldMk cId="387597224" sldId="331"/>
-            <ac:picMk id="9" creationId="{2C36E84B-E175-ECC4-EED7-F20739C47288}"/>
-          </ac:picMkLst>
-        </pc:picChg>
-        <pc:picChg chg="add del mod ord">
-          <ac:chgData name="Lav Dubey" userId="7279828d398a9119" providerId="LiveId" clId="{2AA98B38-00A7-4B61-BAF4-C8311D89AA21}" dt="2026-08-13T08:21:35.564" v="735" actId="478"/>
-          <ac:picMkLst>
-            <pc:docMk/>
-            <pc:sldMk cId="387597224" sldId="331"/>
-            <ac:picMk id="10" creationId="{6B059A60-A3D0-6435-0FE3-769578E9D0E9}"/>
-          </ac:picMkLst>
-        </pc:picChg>
-        <pc:picChg chg="add del mod">
-          <ac:chgData name="Lav Dubey" userId="7279828d398a9119" providerId="LiveId" clId="{2AA98B38-00A7-4B61-BAF4-C8311D89AA21}" dt="2026-08-13T08:21:37.944" v="736" actId="478"/>
-          <ac:picMkLst>
-            <pc:docMk/>
-            <pc:sldMk cId="387597224" sldId="331"/>
-            <ac:picMk id="12" creationId="{A20A49AC-0985-B6C4-53EE-C85836BD1649}"/>
-          </ac:picMkLst>
-        </pc:picChg>
-        <pc:picChg chg="del mod">
-          <ac:chgData name="Lav Dubey" userId="7279828d398a9119" providerId="LiveId" clId="{2AA98B38-00A7-4B61-BAF4-C8311D89AA21}" dt="2026-08-13T08:21:42.120" v="737" actId="478"/>
-          <ac:picMkLst>
-            <pc:docMk/>
-            <pc:sldMk cId="387597224" sldId="331"/>
-            <ac:picMk id="14" creationId="{75C06123-4CEE-0BE0-B617-9DC7B20952F4}"/>
-          </ac:picMkLst>
-        </pc:picChg>
-        <pc:picChg chg="add del mod">
-          <ac:chgData name="Lav Dubey" userId="7279828d398a9119" providerId="LiveId" clId="{2AA98B38-00A7-4B61-BAF4-C8311D89AA21}" dt="2026-08-13T08:21:33.083" v="734" actId="478"/>
-          <ac:picMkLst>
-            <pc:docMk/>
-            <pc:sldMk cId="387597224" sldId="331"/>
-            <ac:picMk id="16" creationId="{169652A3-544D-2A7F-B2E0-811934B7A430}"/>
-          </ac:picMkLst>
-        </pc:picChg>
-        <pc:picChg chg="add del mod">
-          <ac:chgData name="Lav Dubey" userId="7279828d398a9119" providerId="LiveId" clId="{2AA98B38-00A7-4B61-BAF4-C8311D89AA21}" dt="2026-08-13T08:21:31.147" v="733" actId="478"/>
-          <ac:picMkLst>
-            <pc:docMk/>
-            <pc:sldMk cId="387597224" sldId="331"/>
-            <ac:picMk id="18" creationId="{CB406780-BE98-D08C-4D3D-F0853C9AB7B0}"/>
-          </ac:picMkLst>
-        </pc:picChg>
-        <pc:picChg chg="add del mod">
-          <ac:chgData name="Lav Dubey" userId="7279828d398a9119" providerId="LiveId" clId="{2AA98B38-00A7-4B61-BAF4-C8311D89AA21}" dt="2026-08-13T08:21:29.255" v="732" actId="478"/>
-          <ac:picMkLst>
-            <pc:docMk/>
-            <pc:sldMk cId="387597224" sldId="331"/>
-            <ac:picMk id="20" creationId="{C4F9BAB3-6A75-FA3F-6E7D-48650E3185E6}"/>
-          </ac:picMkLst>
-        </pc:picChg>
-        <pc:picChg chg="add mod">
-          <ac:chgData name="Lav Dubey" userId="7279828d398a9119" providerId="LiveId" clId="{2AA98B38-00A7-4B61-BAF4-C8311D89AA21}" dt="2026-08-13T08:25:51.713" v="761" actId="208"/>
-          <ac:picMkLst>
-            <pc:docMk/>
-            <pc:sldMk cId="387597224" sldId="331"/>
-            <ac:picMk id="22" creationId="{6118670E-581E-EB1A-985C-00CC7D88891C}"/>
-          </ac:picMkLst>
-        </pc:picChg>
-        <pc:picChg chg="add mod">
-          <ac:chgData name="Lav Dubey" userId="7279828d398a9119" providerId="LiveId" clId="{2AA98B38-00A7-4B61-BAF4-C8311D89AA21}" dt="2026-08-13T08:25:51.713" v="761" actId="208"/>
-          <ac:picMkLst>
-            <pc:docMk/>
-            <pc:sldMk cId="387597224" sldId="331"/>
-            <ac:picMk id="24" creationId="{591ADE09-86FF-3ACC-7AB2-DCF36E2E6203}"/>
-          </ac:picMkLst>
-        </pc:picChg>
-        <pc:picChg chg="add mod">
-          <ac:chgData name="Lav Dubey" userId="7279828d398a9119" providerId="LiveId" clId="{2AA98B38-00A7-4B61-BAF4-C8311D89AA21}" dt="2026-08-13T08:25:51.713" v="761" actId="208"/>
-          <ac:picMkLst>
-            <pc:docMk/>
-            <pc:sldMk cId="387597224" sldId="331"/>
-            <ac:picMk id="26" creationId="{1323F175-1691-B620-F0D8-EFDBE371EA2F}"/>
-          </ac:picMkLst>
-        </pc:picChg>
-        <pc:picChg chg="mod">
-          <ac:chgData name="Lav Dubey" userId="7279828d398a9119" providerId="LiveId" clId="{2AA98B38-00A7-4B61-BAF4-C8311D89AA21}" dt="2026-08-13T08:25:51.713" v="761" actId="208"/>
-          <ac:picMkLst>
-            <pc:docMk/>
-            <pc:sldMk cId="387597224" sldId="331"/>
-            <ac:picMk id="28" creationId="{871E9620-B105-A80D-3193-C1ADED415A31}"/>
-          </ac:picMkLst>
-        </pc:picChg>
-        <pc:picChg chg="add mod">
-          <ac:chgData name="Lav Dubey" userId="7279828d398a9119" providerId="LiveId" clId="{2AA98B38-00A7-4B61-BAF4-C8311D89AA21}" dt="2026-08-13T08:25:51.713" v="761" actId="208"/>
-          <ac:picMkLst>
-            <pc:docMk/>
-            <pc:sldMk cId="387597224" sldId="331"/>
-            <ac:picMk id="30" creationId="{934AA2D7-D4E6-EE81-E8F0-0CD0BAF4C84B}"/>
-          </ac:picMkLst>
-        </pc:picChg>
-        <pc:picChg chg="mod">
-          <ac:chgData name="Lav Dubey" userId="7279828d398a9119" providerId="LiveId" clId="{2AA98B38-00A7-4B61-BAF4-C8311D89AA21}" dt="2026-08-13T08:25:39.835" v="760" actId="208"/>
-          <ac:picMkLst>
-            <pc:docMk/>
-            <pc:sldMk cId="387597224" sldId="331"/>
-            <ac:picMk id="32" creationId="{1E9C9539-F9AE-8AEB-B722-02B349054AAF}"/>
-          </ac:picMkLst>
-        </pc:picChg>
-      </pc:sldChg>
-      <pc:sldChg chg="delSp modSp add mod modTransition">
-        <pc:chgData name="Lav Dubey" userId="7279828d398a9119" providerId="LiveId" clId="{2AA98B38-00A7-4B61-BAF4-C8311D89AA21}" dt="2026-08-14T15:36:04.517" v="1025"/>
-        <pc:sldMkLst>
-          <pc:docMk/>
-          <pc:sldMk cId="2395868912" sldId="332"/>
-        </pc:sldMkLst>
-        <pc:spChg chg="mod">
-          <ac:chgData name="Lav Dubey" userId="7279828d398a9119" providerId="LiveId" clId="{2AA98B38-00A7-4B61-BAF4-C8311D89AA21}" dt="2026-08-13T08:32:10.753" v="830" actId="404"/>
-          <ac:spMkLst>
-            <pc:docMk/>
-            <pc:sldMk cId="2395868912" sldId="332"/>
-            <ac:spMk id="2" creationId="{41036072-9607-9AE3-006F-39F53C3D0441}"/>
-          </ac:spMkLst>
-        </pc:spChg>
-        <pc:picChg chg="mod">
-          <ac:chgData name="Lav Dubey" userId="7279828d398a9119" providerId="LiveId" clId="{2AA98B38-00A7-4B61-BAF4-C8311D89AA21}" dt="2026-08-13T08:26:12.763" v="762" actId="208"/>
-          <ac:picMkLst>
-            <pc:docMk/>
-            <pc:sldMk cId="2395868912" sldId="332"/>
-            <ac:picMk id="10" creationId="{00F7D1DB-844C-92F4-9F88-EAC897DE2F99}"/>
-          </ac:picMkLst>
-        </pc:picChg>
-        <pc:picChg chg="mod">
-          <ac:chgData name="Lav Dubey" userId="7279828d398a9119" providerId="LiveId" clId="{2AA98B38-00A7-4B61-BAF4-C8311D89AA21}" dt="2026-08-13T08:26:12.763" v="762" actId="208"/>
-          <ac:picMkLst>
-            <pc:docMk/>
-            <pc:sldMk cId="2395868912" sldId="332"/>
-            <ac:picMk id="12" creationId="{906B0233-907C-215A-F4B0-1C5CCA366887}"/>
-          </ac:picMkLst>
-        </pc:picChg>
-        <pc:picChg chg="mod">
-          <ac:chgData name="Lav Dubey" userId="7279828d398a9119" providerId="LiveId" clId="{2AA98B38-00A7-4B61-BAF4-C8311D89AA21}" dt="2026-08-13T08:26:12.763" v="762" actId="208"/>
-          <ac:picMkLst>
-            <pc:docMk/>
-            <pc:sldMk cId="2395868912" sldId="332"/>
-            <ac:picMk id="14" creationId="{F585C1B4-66B3-51C5-EEA9-39EC7A3C2D2E}"/>
-          </ac:picMkLst>
-        </pc:picChg>
-        <pc:picChg chg="mod">
-          <ac:chgData name="Lav Dubey" userId="7279828d398a9119" providerId="LiveId" clId="{2AA98B38-00A7-4B61-BAF4-C8311D89AA21}" dt="2026-08-13T08:26:12.763" v="762" actId="208"/>
-          <ac:picMkLst>
-            <pc:docMk/>
-            <pc:sldMk cId="2395868912" sldId="332"/>
-            <ac:picMk id="16" creationId="{B2104B45-7C0C-2633-6E91-D6A3DC5CFA6B}"/>
-          </ac:picMkLst>
-        </pc:picChg>
-        <pc:picChg chg="mod">
-          <ac:chgData name="Lav Dubey" userId="7279828d398a9119" providerId="LiveId" clId="{2AA98B38-00A7-4B61-BAF4-C8311D89AA21}" dt="2026-08-13T08:26:12.763" v="762" actId="208"/>
-          <ac:picMkLst>
-            <pc:docMk/>
-            <pc:sldMk cId="2395868912" sldId="332"/>
-            <ac:picMk id="18" creationId="{2356B1BB-4919-8CAC-BABA-E11C0643D58A}"/>
-          </ac:picMkLst>
-        </pc:picChg>
-        <pc:picChg chg="mod">
-          <ac:chgData name="Lav Dubey" userId="7279828d398a9119" providerId="LiveId" clId="{2AA98B38-00A7-4B61-BAF4-C8311D89AA21}" dt="2026-08-13T08:26:12.763" v="762" actId="208"/>
-          <ac:picMkLst>
-            <pc:docMk/>
-            <pc:sldMk cId="2395868912" sldId="332"/>
-            <ac:picMk id="20" creationId="{4A6FFB90-5E71-3E00-4655-71D19E3BB161}"/>
-          </ac:picMkLst>
-        </pc:picChg>
-        <pc:picChg chg="del">
-          <ac:chgData name="Lav Dubey" userId="7279828d398a9119" providerId="LiveId" clId="{2AA98B38-00A7-4B61-BAF4-C8311D89AA21}" dt="2026-08-13T08:18:52.045" v="667" actId="478"/>
-          <ac:picMkLst>
-            <pc:docMk/>
-            <pc:sldMk cId="2395868912" sldId="332"/>
-            <ac:picMk id="22" creationId="{72C34BE8-D128-BB83-56DD-4107AB1FB8BF}"/>
-          </ac:picMkLst>
-        </pc:picChg>
-        <pc:picChg chg="del mod">
-          <ac:chgData name="Lav Dubey" userId="7279828d398a9119" providerId="LiveId" clId="{2AA98B38-00A7-4B61-BAF4-C8311D89AA21}" dt="2026-08-13T08:25:13.676" v="759" actId="478"/>
-          <ac:picMkLst>
-            <pc:docMk/>
-            <pc:sldMk cId="2395868912" sldId="332"/>
-            <ac:picMk id="24" creationId="{510F85B7-F303-28A1-FD05-233B20FB0B80}"/>
-          </ac:picMkLst>
-        </pc:picChg>
-        <pc:picChg chg="del">
-          <ac:chgData name="Lav Dubey" userId="7279828d398a9119" providerId="LiveId" clId="{2AA98B38-00A7-4B61-BAF4-C8311D89AA21}" dt="2026-08-13T08:18:58.448" v="670" actId="478"/>
-          <ac:picMkLst>
-            <pc:docMk/>
-            <pc:sldMk cId="2395868912" sldId="332"/>
-            <ac:picMk id="26" creationId="{0FBCD8D5-4A8E-C9A3-471B-02F68FD2C538}"/>
-          </ac:picMkLst>
-        </pc:picChg>
-        <pc:picChg chg="del">
-          <ac:chgData name="Lav Dubey" userId="7279828d398a9119" providerId="LiveId" clId="{2AA98B38-00A7-4B61-BAF4-C8311D89AA21}" dt="2026-08-13T08:18:44.349" v="666" actId="478"/>
-          <ac:picMkLst>
-            <pc:docMk/>
-            <pc:sldMk cId="2395868912" sldId="332"/>
-            <ac:picMk id="28" creationId="{CDC05C94-5185-8FCE-F167-AFA51E501A98}"/>
-          </ac:picMkLst>
-        </pc:picChg>
-        <pc:picChg chg="del">
-          <ac:chgData name="Lav Dubey" userId="7279828d398a9119" providerId="LiveId" clId="{2AA98B38-00A7-4B61-BAF4-C8311D89AA21}" dt="2026-08-13T08:18:54.769" v="668" actId="478"/>
-          <ac:picMkLst>
-            <pc:docMk/>
-            <pc:sldMk cId="2395868912" sldId="332"/>
-            <ac:picMk id="30" creationId="{5F8C9BC8-60D2-69A8-563A-F7954B129E64}"/>
-          </ac:picMkLst>
-        </pc:picChg>
-        <pc:picChg chg="del">
-          <ac:chgData name="Lav Dubey" userId="7279828d398a9119" providerId="LiveId" clId="{2AA98B38-00A7-4B61-BAF4-C8311D89AA21}" dt="2026-08-13T08:18:56.457" v="669" actId="478"/>
-          <ac:picMkLst>
-            <pc:docMk/>
-            <pc:sldMk cId="2395868912" sldId="332"/>
-            <ac:picMk id="32" creationId="{43A8F0B7-4F55-A2B0-DAA6-2DE249228B30}"/>
-          </ac:picMkLst>
-        </pc:picChg>
-      </pc:sldChg>
-      <pc:sldChg chg="delSp modSp add mod modTransition">
-        <pc:chgData name="Lav Dubey" userId="7279828d398a9119" providerId="LiveId" clId="{2AA98B38-00A7-4B61-BAF4-C8311D89AA21}" dt="2026-08-14T15:36:04.517" v="1025"/>
-        <pc:sldMkLst>
-          <pc:docMk/>
-          <pc:sldMk cId="1089081489" sldId="333"/>
-        </pc:sldMkLst>
-        <pc:spChg chg="mod">
-          <ac:chgData name="Lav Dubey" userId="7279828d398a9119" providerId="LiveId" clId="{2AA98B38-00A7-4B61-BAF4-C8311D89AA21}" dt="2026-08-13T09:37:26.665" v="1004" actId="2711"/>
-          <ac:spMkLst>
-            <pc:docMk/>
-            <pc:sldMk cId="1089081489" sldId="333"/>
-            <ac:spMk id="2" creationId="{58E99EB8-ABC1-CF54-49C7-92939155DCFB}"/>
-          </ac:spMkLst>
-        </pc:spChg>
-        <pc:spChg chg="del mod">
-          <ac:chgData name="Lav Dubey" userId="7279828d398a9119" providerId="LiveId" clId="{2AA98B38-00A7-4B61-BAF4-C8311D89AA21}" dt="2026-08-13T09:36:16.492" v="987" actId="478"/>
-          <ac:spMkLst>
-            <pc:docMk/>
-            <pc:sldMk cId="1089081489" sldId="333"/>
-            <ac:spMk id="3" creationId="{6FADB138-AAEE-E5CA-2A41-F0F11B218B56}"/>
-          </ac:spMkLst>
-        </pc:spChg>
-      </pc:sldChg>
-      <pc:sldMasterChg chg="modTransition modSldLayout">
-        <pc:chgData name="Lav Dubey" userId="7279828d398a9119" providerId="LiveId" clId="{2AA98B38-00A7-4B61-BAF4-C8311D89AA21}" dt="2026-08-14T15:36:04.517" v="1025"/>
-        <pc:sldMasterMkLst>
-          <pc:docMk/>
-          <pc:sldMasterMk cId="154833434" sldId="2147483650"/>
-        </pc:sldMasterMkLst>
-        <pc:sldLayoutChg chg="modTransition">
-          <pc:chgData name="Lav Dubey" userId="7279828d398a9119" providerId="LiveId" clId="{2AA98B38-00A7-4B61-BAF4-C8311D89AA21}" dt="2026-08-14T15:36:04.517" v="1025"/>
-          <pc:sldLayoutMkLst>
-            <pc:docMk/>
-            <pc:sldMasterMk cId="154833434" sldId="2147483650"/>
-            <pc:sldLayoutMk cId="2631799807" sldId="2147483651"/>
-          </pc:sldLayoutMkLst>
-        </pc:sldLayoutChg>
-        <pc:sldLayoutChg chg="modTransition">
-          <pc:chgData name="Lav Dubey" userId="7279828d398a9119" providerId="LiveId" clId="{2AA98B38-00A7-4B61-BAF4-C8311D89AA21}" dt="2026-08-14T15:36:04.517" v="1025"/>
-          <pc:sldLayoutMkLst>
-            <pc:docMk/>
-            <pc:sldMasterMk cId="154833434" sldId="2147483650"/>
-            <pc:sldLayoutMk cId="1681789449" sldId="2147483653"/>
-          </pc:sldLayoutMkLst>
-        </pc:sldLayoutChg>
-        <pc:sldLayoutChg chg="modTransition">
-          <pc:chgData name="Lav Dubey" userId="7279828d398a9119" providerId="LiveId" clId="{2AA98B38-00A7-4B61-BAF4-C8311D89AA21}" dt="2026-08-14T15:36:04.517" v="1025"/>
-          <pc:sldLayoutMkLst>
-            <pc:docMk/>
-            <pc:sldMasterMk cId="154833434" sldId="2147483650"/>
-            <pc:sldLayoutMk cId="2071868441" sldId="2147483656"/>
-          </pc:sldLayoutMkLst>
-        </pc:sldLayoutChg>
-        <pc:sldLayoutChg chg="modTransition">
-          <pc:chgData name="Lav Dubey" userId="7279828d398a9119" providerId="LiveId" clId="{2AA98B38-00A7-4B61-BAF4-C8311D89AA21}" dt="2026-08-14T15:36:04.517" v="1025"/>
-          <pc:sldLayoutMkLst>
-            <pc:docMk/>
-            <pc:sldMasterMk cId="154833434" sldId="2147483650"/>
-            <pc:sldLayoutMk cId="1581182869" sldId="2147483657"/>
-          </pc:sldLayoutMkLst>
-        </pc:sldLayoutChg>
-        <pc:sldLayoutChg chg="modTransition">
-          <pc:chgData name="Lav Dubey" userId="7279828d398a9119" providerId="LiveId" clId="{2AA98B38-00A7-4B61-BAF4-C8311D89AA21}" dt="2026-08-14T15:36:04.517" v="1025"/>
-          <pc:sldLayoutMkLst>
-            <pc:docMk/>
-            <pc:sldMasterMk cId="154833434" sldId="2147483650"/>
-            <pc:sldLayoutMk cId="2745005521" sldId="2147483658"/>
-          </pc:sldLayoutMkLst>
-        </pc:sldLayoutChg>
-        <pc:sldLayoutChg chg="modTransition">
-          <pc:chgData name="Lav Dubey" userId="7279828d398a9119" providerId="LiveId" clId="{2AA98B38-00A7-4B61-BAF4-C8311D89AA21}" dt="2026-08-14T15:36:04.517" v="1025"/>
-          <pc:sldLayoutMkLst>
-            <pc:docMk/>
-            <pc:sldMasterMk cId="154833434" sldId="2147483650"/>
-            <pc:sldLayoutMk cId="2234670087" sldId="2147483659"/>
-          </pc:sldLayoutMkLst>
-        </pc:sldLayoutChg>
-        <pc:sldLayoutChg chg="modTransition">
-          <pc:chgData name="Lav Dubey" userId="7279828d398a9119" providerId="LiveId" clId="{2AA98B38-00A7-4B61-BAF4-C8311D89AA21}" dt="2026-08-14T15:36:04.517" v="1025"/>
-          <pc:sldLayoutMkLst>
-            <pc:docMk/>
-            <pc:sldMasterMk cId="154833434" sldId="2147483650"/>
-            <pc:sldLayoutMk cId="2333964501" sldId="2147483663"/>
-          </pc:sldLayoutMkLst>
-        </pc:sldLayoutChg>
-        <pc:sldLayoutChg chg="modTransition">
-          <pc:chgData name="Lav Dubey" userId="7279828d398a9119" providerId="LiveId" clId="{2AA98B38-00A7-4B61-BAF4-C8311D89AA21}" dt="2026-08-14T15:36:04.517" v="1025"/>
-          <pc:sldLayoutMkLst>
-            <pc:docMk/>
-            <pc:sldMasterMk cId="154833434" sldId="2147483650"/>
-            <pc:sldLayoutMk cId="552850918" sldId="2147483668"/>
-          </pc:sldLayoutMkLst>
-        </pc:sldLayoutChg>
-        <pc:sldLayoutChg chg="modTransition">
-          <pc:chgData name="Lav Dubey" userId="7279828d398a9119" providerId="LiveId" clId="{2AA98B38-00A7-4B61-BAF4-C8311D89AA21}" dt="2026-08-14T15:36:04.517" v="1025"/>
-          <pc:sldLayoutMkLst>
-            <pc:docMk/>
-            <pc:sldMasterMk cId="154833434" sldId="2147483650"/>
-            <pc:sldLayoutMk cId="2372898826" sldId="2147483676"/>
-          </pc:sldLayoutMkLst>
-        </pc:sldLayoutChg>
-        <pc:sldLayoutChg chg="modTransition">
-          <pc:chgData name="Lav Dubey" userId="7279828d398a9119" providerId="LiveId" clId="{2AA98B38-00A7-4B61-BAF4-C8311D89AA21}" dt="2026-08-14T15:36:04.517" v="1025"/>
-          <pc:sldLayoutMkLst>
-            <pc:docMk/>
-            <pc:sldMasterMk cId="154833434" sldId="2147483650"/>
-            <pc:sldLayoutMk cId="433189165" sldId="2147483680"/>
-          </pc:sldLayoutMkLst>
-        </pc:sldLayoutChg>
-        <pc:sldLayoutChg chg="modTransition">
-          <pc:chgData name="Lav Dubey" userId="7279828d398a9119" providerId="LiveId" clId="{2AA98B38-00A7-4B61-BAF4-C8311D89AA21}" dt="2026-08-14T15:36:04.517" v="1025"/>
-          <pc:sldLayoutMkLst>
-            <pc:docMk/>
-            <pc:sldMasterMk cId="154833434" sldId="2147483650"/>
-            <pc:sldLayoutMk cId="3116296531" sldId="2147483685"/>
-          </pc:sldLayoutMkLst>
-        </pc:sldLayoutChg>
-        <pc:sldLayoutChg chg="modTransition">
-          <pc:chgData name="Lav Dubey" userId="7279828d398a9119" providerId="LiveId" clId="{2AA98B38-00A7-4B61-BAF4-C8311D89AA21}" dt="2026-08-14T15:36:04.517" v="1025"/>
-          <pc:sldLayoutMkLst>
-            <pc:docMk/>
-            <pc:sldMasterMk cId="154833434" sldId="2147483650"/>
-            <pc:sldLayoutMk cId="1686733275" sldId="2147483686"/>
-          </pc:sldLayoutMkLst>
-        </pc:sldLayoutChg>
-        <pc:sldLayoutChg chg="modTransition">
-          <pc:chgData name="Lav Dubey" userId="7279828d398a9119" providerId="LiveId" clId="{2AA98B38-00A7-4B61-BAF4-C8311D89AA21}" dt="2026-08-14T15:36:04.517" v="1025"/>
-          <pc:sldLayoutMkLst>
-            <pc:docMk/>
-            <pc:sldMasterMk cId="154833434" sldId="2147483650"/>
-            <pc:sldLayoutMk cId="3183620452" sldId="2147483687"/>
-          </pc:sldLayoutMkLst>
-        </pc:sldLayoutChg>
-        <pc:sldLayoutChg chg="modTransition">
-          <pc:chgData name="Lav Dubey" userId="7279828d398a9119" providerId="LiveId" clId="{2AA98B38-00A7-4B61-BAF4-C8311D89AA21}" dt="2026-08-14T15:36:04.517" v="1025"/>
-          <pc:sldLayoutMkLst>
-            <pc:docMk/>
-            <pc:sldMasterMk cId="154833434" sldId="2147483650"/>
-            <pc:sldLayoutMk cId="2207104535" sldId="2147483688"/>
-          </pc:sldLayoutMkLst>
-        </pc:sldLayoutChg>
-        <pc:sldLayoutChg chg="modTransition">
-          <pc:chgData name="Lav Dubey" userId="7279828d398a9119" providerId="LiveId" clId="{2AA98B38-00A7-4B61-BAF4-C8311D89AA21}" dt="2026-08-14T15:36:04.517" v="1025"/>
-          <pc:sldLayoutMkLst>
-            <pc:docMk/>
-            <pc:sldMasterMk cId="154833434" sldId="2147483650"/>
-            <pc:sldLayoutMk cId="2203958812" sldId="2147483689"/>
-          </pc:sldLayoutMkLst>
-        </pc:sldLayoutChg>
-        <pc:sldLayoutChg chg="modTransition">
-          <pc:chgData name="Lav Dubey" userId="7279828d398a9119" providerId="LiveId" clId="{2AA98B38-00A7-4B61-BAF4-C8311D89AA21}" dt="2026-08-14T15:36:04.517" v="1025"/>
-          <pc:sldLayoutMkLst>
-            <pc:docMk/>
-            <pc:sldMasterMk cId="154833434" sldId="2147483650"/>
-            <pc:sldLayoutMk cId="2586650709" sldId="2147483691"/>
-          </pc:sldLayoutMkLst>
-        </pc:sldLayoutChg>
-        <pc:sldLayoutChg chg="modTransition">
-          <pc:chgData name="Lav Dubey" userId="7279828d398a9119" providerId="LiveId" clId="{2AA98B38-00A7-4B61-BAF4-C8311D89AA21}" dt="2026-08-14T15:36:04.517" v="1025"/>
-          <pc:sldLayoutMkLst>
-            <pc:docMk/>
-            <pc:sldMasterMk cId="154833434" sldId="2147483650"/>
-            <pc:sldLayoutMk cId="2767508154" sldId="2147483692"/>
-          </pc:sldLayoutMkLst>
-        </pc:sldLayoutChg>
-      </pc:sldMasterChg>
     </pc:docChg>
   </pc:docChgLst>
 </pc:chgInfo>
@@ -19621,8 +18669,8 @@
         </p:nvSpPr>
         <p:spPr>
           <a:xfrm>
-            <a:off x="9311149" y="3834581"/>
-            <a:ext cx="2703870" cy="2585323"/>
+            <a:off x="9311149" y="4576519"/>
+            <a:ext cx="2703870" cy="1200329"/>
           </a:xfrm>
           <a:prstGeom prst="rect">
             <a:avLst/>
@@ -19644,7 +18692,7 @@
                 </a:solidFill>
                 <a:latin typeface="+mj-lt"/>
               </a:rPr>
-              <a:t>GROUP - 5</a:t>
+              <a:t>PRESENTED BY-</a:t>
             </a:r>
           </a:p>
           <a:p>
@@ -19658,58 +18706,6 @@
                 <a:latin typeface="Bookman Old Style" panose="02050604050505020204" pitchFamily="18" charset="0"/>
               </a:rPr>
               <a:t>Lav Dubey  </a:t>
-            </a:r>
-          </a:p>
-          <a:p>
-            <a:r>
-              <a:rPr lang="en-US" dirty="0">
-                <a:latin typeface="Bookman Old Style" panose="02050604050505020204" pitchFamily="18" charset="0"/>
-              </a:rPr>
-              <a:t>Dev Jyoti Chand</a:t>
-            </a:r>
-          </a:p>
-          <a:p>
-            <a:r>
-              <a:rPr lang="en-US" dirty="0">
-                <a:latin typeface="Bookman Old Style" panose="02050604050505020204" pitchFamily="18" charset="0"/>
-              </a:rPr>
-              <a:t>Pavan Kumar</a:t>
-            </a:r>
-          </a:p>
-          <a:p>
-            <a:r>
-              <a:rPr lang="en-US" dirty="0">
-                <a:latin typeface="Bookman Old Style" panose="02050604050505020204" pitchFamily="18" charset="0"/>
-              </a:rPr>
-              <a:t>Ayush Sonar</a:t>
-            </a:r>
-          </a:p>
-          <a:p>
-            <a:r>
-              <a:rPr lang="en-US" dirty="0">
-                <a:latin typeface="Bookman Old Style" panose="02050604050505020204" pitchFamily="18" charset="0"/>
-              </a:rPr>
-              <a:t>Kiran </a:t>
-            </a:r>
-            <a:r>
-              <a:rPr lang="en-US" dirty="0" err="1">
-                <a:latin typeface="Bookman Old Style" panose="02050604050505020204" pitchFamily="18" charset="0"/>
-              </a:rPr>
-              <a:t>Bantakeri</a:t>
-            </a:r>
-            <a:r>
-              <a:rPr lang="en-US" dirty="0">
-                <a:latin typeface="Bookman Old Style" panose="02050604050505020204" pitchFamily="18" charset="0"/>
-              </a:rPr>
-              <a:t> </a:t>
-            </a:r>
-          </a:p>
-          <a:p>
-            <a:r>
-              <a:rPr lang="en-US" dirty="0">
-                <a:latin typeface="Bookman Old Style" panose="02050604050505020204" pitchFamily="18" charset="0"/>
-              </a:rPr>
-              <a:t>Abdul Rafe Ahmed   </a:t>
             </a:r>
           </a:p>
           <a:p>
@@ -24582,6 +23578,15 @@
 </file>
 
 <file path=customXml/item2.xml><?xml version="1.0" encoding="utf-8"?>
+<?mso-contentType ?>
+<FormTemplates xmlns="http://schemas.microsoft.com/sharepoint/v3/contenttype/forms">
+  <Display>DocumentLibraryForm</Display>
+  <Edit>DocumentLibraryForm</Edit>
+  <New>DocumentLibraryForm</New>
+</FormTemplates>
+</file>
+
+<file path=customXml/item3.xml><?xml version="1.0" encoding="utf-8"?>
 <ct:contentTypeSchema xmlns:ct="http://schemas.microsoft.com/office/2006/metadata/contentType" xmlns:ma="http://schemas.microsoft.com/office/2006/metadata/properties/metaAttributes" ct:_="" ma:_="" ma:contentTypeName="Document" ma:contentTypeID="0x01010079F111ED35F8CC479449609E8A0923A6" ma:contentTypeVersion="28" ma:contentTypeDescription="Create a new document." ma:contentTypeScope="" ma:versionID="60f5a4f2d2b0abadcf532d48ebf9cb71">
   <xsd:schema xmlns:xsd="http://www.w3.org/2001/XMLSchema" xmlns:xs="http://www.w3.org/2001/XMLSchema" xmlns:p="http://schemas.microsoft.com/office/2006/metadata/properties" xmlns:ns1="http://schemas.microsoft.com/sharepoint/v3" xmlns:ns2="71af3243-3dd4-4a8d-8c0d-dd76da1f02a5" xmlns:ns3="16c05727-aa75-4e4a-9b5f-8a80a1165891" xmlns:ns4="230e9df3-be65-4c73-a93b-d1236ebd677e" targetNamespace="http://schemas.microsoft.com/office/2006/metadata/properties" ma:root="true" ma:fieldsID="7dd78129e6a1811f84807ad11c651531" ns1:_="" ns2:_="" ns3:_="" ns4:_="">
     <xsd:import namespace="http://schemas.microsoft.com/sharepoint/v3"/>
@@ -24893,15 +23898,6 @@
 </ct:contentTypeSchema>
 </file>
 
-<file path=customXml/item3.xml><?xml version="1.0" encoding="utf-8"?>
-<?mso-contentType ?>
-<FormTemplates xmlns="http://schemas.microsoft.com/sharepoint/v3/contenttype/forms">
-  <Display>DocumentLibraryForm</Display>
-  <Edit>DocumentLibraryForm</Edit>
-  <New>DocumentLibraryForm</New>
-</FormTemplates>
-</file>
-
 <file path=customXml/itemProps1.xml><?xml version="1.0" encoding="utf-8"?>
 <ds:datastoreItem xmlns:ds="http://schemas.openxmlformats.org/officeDocument/2006/customXml" ds:itemID="{BA719FA4-954C-4FA8-82CB-206659C3B826}">
   <ds:schemaRefs>
@@ -24915,6 +23911,14 @@
 </file>
 
 <file path=customXml/itemProps2.xml><?xml version="1.0" encoding="utf-8"?>
+<ds:datastoreItem xmlns:ds="http://schemas.openxmlformats.org/officeDocument/2006/customXml" ds:itemID="{16DBB56F-4362-4386-A1A1-3DF898896616}">
+  <ds:schemaRefs>
+    <ds:schemaRef ds:uri="http://schemas.microsoft.com/sharepoint/v3/contenttype/forms"/>
+  </ds:schemaRefs>
+</ds:datastoreItem>
+</file>
+
+<file path=customXml/itemProps3.xml><?xml version="1.0" encoding="utf-8"?>
 <ds:datastoreItem xmlns:ds="http://schemas.openxmlformats.org/officeDocument/2006/customXml" ds:itemID="{04948363-B267-4BAC-8655-100FBEC280C1}">
   <ds:schemaRefs>
     <ds:schemaRef ds:uri="http://schemas.microsoft.com/office/2006/metadata/contentType"/>
@@ -24935,14 +23939,6 @@
 </ds:datastoreItem>
 </file>
 
-<file path=customXml/itemProps3.xml><?xml version="1.0" encoding="utf-8"?>
-<ds:datastoreItem xmlns:ds="http://schemas.openxmlformats.org/officeDocument/2006/customXml" ds:itemID="{16DBB56F-4362-4386-A1A1-3DF898896616}">
-  <ds:schemaRefs>
-    <ds:schemaRef ds:uri="http://schemas.microsoft.com/sharepoint/v3/contenttype/forms"/>
-  </ds:schemaRefs>
-</ds:datastoreItem>
-</file>
-
 <file path=docMetadata/LabelInfo.xml><?xml version="1.0" encoding="utf-8"?>
 <clbl:labelList xmlns:clbl="http://schemas.microsoft.com/office/2020/mipLabelMetadata"/>
 </file>